--- a/vault/blogs/gemma-4-vs-llama-4-vs-qwen-3-5/slides.pptx
+++ b/vault/blogs/gemma-4-vs-llama-4-vs-qwen-3-5/slides.pptx
@@ -3677,7 +3677,7 @@
                   <a:srgbClr val="FFFFFF"/>
                 </a:solidFill>
               </a:rPr>
-              <a:t>  For the [[research/google/2026-04-30|April 30 Google note]], the Gemini Enterprise Agent Platform launched the same week</a:t>
+              <a:t>  For the April 30 Google research note, the Gemini Enterprise Agent Platform launched the same week</a:t>
             </a:r>
           </a:p>
         </p:txBody>
